--- a/word-drafts/figures/AAS-Fig5-Shell.pptx
+++ b/word-drafts/figures/AAS-Fig5-Shell.pptx
@@ -3799,7 +3799,7 @@
         <p:spPr>
           <a:xfrm>
             <a:off x="6524625" y="1228725"/>
-            <a:ext cx="485775" cy="123825"/>
+            <a:ext cx="609600" cy="123825"/>
           </a:xfrm>
           <a:prstGeom prst="rect">
             <a:avLst/>
@@ -3871,7 +3871,7 @@
         <p:spPr>
           <a:xfrm>
             <a:off x="4595812" y="2314575"/>
-            <a:ext cx="619125" cy="123825"/>
+            <a:ext cx="762000" cy="123825"/>
           </a:xfrm>
           <a:prstGeom prst="rect">
             <a:avLst/>
@@ -3982,7 +3982,7 @@
         <p:spPr>
           <a:xfrm>
             <a:off x="5881687" y="2314575"/>
-            <a:ext cx="495300" cy="123825"/>
+            <a:ext cx="619125" cy="123825"/>
           </a:xfrm>
           <a:prstGeom prst="rect">
             <a:avLst/>
@@ -4054,7 +4054,7 @@
         <p:spPr>
           <a:xfrm>
             <a:off x="7167562" y="2314575"/>
-            <a:ext cx="495300" cy="123825"/>
+            <a:ext cx="619125" cy="123825"/>
           </a:xfrm>
           <a:prstGeom prst="rect">
             <a:avLst/>
@@ -4126,7 +4126,7 @@
         <p:spPr>
           <a:xfrm>
             <a:off x="8453437" y="2314575"/>
-            <a:ext cx="495300" cy="123825"/>
+            <a:ext cx="619125" cy="123825"/>
           </a:xfrm>
           <a:prstGeom prst="rect">
             <a:avLst/>
@@ -4198,7 +4198,7 @@
         <p:spPr>
           <a:xfrm>
             <a:off x="3952875" y="4486275"/>
-            <a:ext cx="495300" cy="123825"/>
+            <a:ext cx="619125" cy="123825"/>
           </a:xfrm>
           <a:prstGeom prst="rect">
             <a:avLst/>
@@ -4270,7 +4270,7 @@
         <p:spPr>
           <a:xfrm>
             <a:off x="5238750" y="4486275"/>
-            <a:ext cx="495300" cy="123825"/>
+            <a:ext cx="619125" cy="123825"/>
           </a:xfrm>
           <a:prstGeom prst="rect">
             <a:avLst/>
@@ -4342,7 +4342,7 @@
         <p:spPr>
           <a:xfrm>
             <a:off x="6524625" y="4486275"/>
-            <a:ext cx="495300" cy="123825"/>
+            <a:ext cx="619125" cy="123825"/>
           </a:xfrm>
           <a:prstGeom prst="rect">
             <a:avLst/>
@@ -4414,7 +4414,7 @@
         <p:spPr>
           <a:xfrm>
             <a:off x="7810500" y="4486275"/>
-            <a:ext cx="495300" cy="123825"/>
+            <a:ext cx="619125" cy="123825"/>
           </a:xfrm>
           <a:prstGeom prst="rect">
             <a:avLst/>
@@ -4486,7 +4486,7 @@
         <p:spPr>
           <a:xfrm>
             <a:off x="9096375" y="4486275"/>
-            <a:ext cx="495300" cy="123825"/>
+            <a:ext cx="619125" cy="123825"/>
           </a:xfrm>
           <a:prstGeom prst="rect">
             <a:avLst/>
